--- a/final report.pptx
+++ b/final report.pptx
@@ -5,7 +5,7 @@
     <p:sldMasterId id="2147483648" r:id="rId1"/>
   </p:sldMasterIdLst>
   <p:notesMasterIdLst>
-    <p:notesMasterId r:id="rId12"/>
+    <p:notesMasterId r:id="rId11"/>
   </p:notesMasterIdLst>
   <p:sldIdLst>
     <p:sldId id="265" r:id="rId2"/>
@@ -16,27 +16,26 @@
     <p:sldId id="278" r:id="rId7"/>
     <p:sldId id="310" r:id="rId8"/>
     <p:sldId id="313" r:id="rId9"/>
-    <p:sldId id="315" r:id="rId10"/>
-    <p:sldId id="285" r:id="rId11"/>
+    <p:sldId id="285" r:id="rId10"/>
   </p:sldIdLst>
   <p:sldSz cx="12192000" cy="6858000"/>
   <p:notesSz cx="6858000" cy="9144000"/>
   <p:embeddedFontLst>
     <p:embeddedFont>
-      <p:font typeface="等线 Light" panose="02010600030101010101" pitchFamily="2" charset="-122"/>
-      <p:regular r:id="rId13"/>
-    </p:embeddedFont>
-    <p:embeddedFont>
       <p:font typeface="Verdana" panose="020B0604030504040204" pitchFamily="34" charset="0"/>
-      <p:regular r:id="rId14"/>
-      <p:bold r:id="rId15"/>
-      <p:italic r:id="rId16"/>
-      <p:boldItalic r:id="rId17"/>
+      <p:regular r:id="rId12"/>
+      <p:bold r:id="rId13"/>
+      <p:italic r:id="rId14"/>
+      <p:boldItalic r:id="rId15"/>
     </p:embeddedFont>
     <p:embeddedFont>
       <p:font typeface="等线" panose="02010600030101010101" pitchFamily="2" charset="-122"/>
+      <p:regular r:id="rId16"/>
+      <p:bold r:id="rId17"/>
+    </p:embeddedFont>
+    <p:embeddedFont>
+      <p:font typeface="等线 Light" panose="02010600030101010101" pitchFamily="2" charset="-122"/>
       <p:regular r:id="rId18"/>
-      <p:bold r:id="rId19"/>
     </p:embeddedFont>
   </p:embeddedFontLst>
   <p:defaultTextStyle>
@@ -552,6 +551,26 @@
               <a:tabLst/>
               <a:defRPr/>
             </a:pPr>
+            <a:r>
+              <a:rPr lang="en-US" altLang="zh-CN" dirty="0" smtClean="0"/>
+              <a:t>The theme of our project</a:t>
+            </a:r>
+            <a:r>
+              <a:rPr lang="en-US" altLang="zh-CN" baseline="0" dirty="0" smtClean="0"/>
+              <a:t> is </a:t>
+            </a:r>
+            <a:r>
+              <a:rPr lang="en-US" altLang="zh-CN" sz="1200" b="0" i="0" kern="1200" dirty="0" smtClean="0">
+                <a:solidFill>
+                  <a:schemeClr val="tx1"/>
+                </a:solidFill>
+                <a:effectLst/>
+                <a:latin typeface="+mn-lt"/>
+                <a:ea typeface="+mn-ea"/>
+                <a:cs typeface="+mn-cs"/>
+              </a:rPr>
+              <a:t>hierarchical reinforcement learning to jointly allocate GPU resources and place jobs. </a:t>
+            </a:r>
             <a:endParaRPr lang="zh-CN" altLang="en-US" dirty="0"/>
           </a:p>
         </p:txBody>
@@ -583,90 +602,6 @@
     <p:extLst>
       <p:ext uri="{BB962C8B-B14F-4D97-AF65-F5344CB8AC3E}">
         <p14:creationId xmlns:p14="http://schemas.microsoft.com/office/powerpoint/2010/main" val="1275888014"/>
-      </p:ext>
-    </p:extLst>
-  </p:cSld>
-  <p:clrMapOvr>
-    <a:masterClrMapping/>
-  </p:clrMapOvr>
-</p:notes>
-</file>
-
-<file path=ppt/notesSlides/notesSlide10.xml><?xml version="1.0" encoding="utf-8"?>
-<p:notes xmlns:a="http://schemas.openxmlformats.org/drawingml/2006/main" xmlns:r="http://schemas.openxmlformats.org/officeDocument/2006/relationships" xmlns:p="http://schemas.openxmlformats.org/presentationml/2006/main">
-  <p:cSld>
-    <p:spTree>
-      <p:nvGrpSpPr>
-        <p:cNvPr id="1" name=""/>
-        <p:cNvGrpSpPr/>
-        <p:nvPr/>
-      </p:nvGrpSpPr>
-      <p:grpSpPr>
-        <a:xfrm>
-          <a:off x="0" y="0"/>
-          <a:ext cx="0" cy="0"/>
-          <a:chOff x="0" y="0"/>
-          <a:chExt cx="0" cy="0"/>
-        </a:xfrm>
-      </p:grpSpPr>
-      <p:sp>
-        <p:nvSpPr>
-          <p:cNvPr id="2" name="幻灯片图像占位符 1"/>
-          <p:cNvSpPr>
-            <a:spLocks noGrp="1" noRot="1" noChangeAspect="1"/>
-          </p:cNvSpPr>
-          <p:nvPr>
-            <p:ph type="sldImg"/>
-          </p:nvPr>
-        </p:nvSpPr>
-        <p:spPr/>
-      </p:sp>
-      <p:sp>
-        <p:nvSpPr>
-          <p:cNvPr id="3" name="备注占位符 2"/>
-          <p:cNvSpPr>
-            <a:spLocks noGrp="1"/>
-          </p:cNvSpPr>
-          <p:nvPr>
-            <p:ph type="body" idx="1"/>
-          </p:nvPr>
-        </p:nvSpPr>
-        <p:spPr/>
-        <p:txBody>
-          <a:bodyPr/>
-          <a:lstStyle/>
-          <a:p>
-            <a:endParaRPr lang="zh-CN" altLang="en-US" dirty="0"/>
-          </a:p>
-        </p:txBody>
-      </p:sp>
-      <p:sp>
-        <p:nvSpPr>
-          <p:cNvPr id="4" name="灯片编号占位符 3"/>
-          <p:cNvSpPr>
-            <a:spLocks noGrp="1"/>
-          </p:cNvSpPr>
-          <p:nvPr>
-            <p:ph type="sldNum" sz="quarter" idx="5"/>
-          </p:nvPr>
-        </p:nvSpPr>
-        <p:spPr/>
-        <p:txBody>
-          <a:bodyPr/>
-          <a:lstStyle/>
-          <a:p>
-            <a:fld id="{313FA922-7152-4116-8B91-582AC3B594D0}" type="slidenum">
-              <a:rPr lang="zh-CN" altLang="en-US" smtClean="0"/>
-              <a:t>10</a:t>
-            </a:fld>
-            <a:endParaRPr lang="zh-CN" altLang="en-US"/>
-          </a:p>
-        </p:txBody>
-      </p:sp>
-    </p:spTree>
-    <p:extLst>
-      <p:ext uri="{BB962C8B-B14F-4D97-AF65-F5344CB8AC3E}">
-        <p14:creationId xmlns:p14="http://schemas.microsoft.com/office/powerpoint/2010/main" val="5395551"/>
       </p:ext>
     </p:extLst>
   </p:cSld>
@@ -747,7 +682,7 @@
                 <a:ea typeface="+mn-ea"/>
                 <a:cs typeface="+mn-cs"/>
               </a:rPr>
-              <a:t>Previously, I have researched at the Research Lab for Computer Architecture under the guidance of Prof. Bu Kai since my sophomore year. My</a:t>
+              <a:t>Firstly, I will quickly introduce my project background, which is mainly divided into </a:t>
             </a:r>
             <a:r>
               <a:rPr lang="en-US" altLang="zh-CN" sz="1200" kern="1200" baseline="0" dirty="0" smtClean="0">
@@ -759,7 +694,19 @@
                 <a:ea typeface="+mn-ea"/>
                 <a:cs typeface="+mn-cs"/>
               </a:rPr>
-              <a:t> major project is memory acceleration.</a:t>
+              <a:t>three part, </a:t>
+            </a:r>
+            <a:r>
+              <a:rPr lang="en-US" altLang="zh-CN" sz="1200" kern="1200" dirty="0" smtClean="0">
+                <a:solidFill>
+                  <a:schemeClr val="tx1"/>
+                </a:solidFill>
+                <a:effectLst/>
+                <a:latin typeface="+mn-lt"/>
+                <a:ea typeface="+mn-ea"/>
+                <a:cs typeface="+mn-cs"/>
+              </a:rPr>
+              <a:t> </a:t>
             </a:r>
             <a:endParaRPr lang="zh-CN" altLang="en-US" dirty="0"/>
           </a:p>
@@ -872,12 +819,9 @@
                 <a:ea typeface="+mn-ea"/>
                 <a:cs typeface="+mn-cs"/>
               </a:rPr>
-              <a:t>In this work, we develop a novel logging mechanism. </a:t>
-            </a:r>
-            <a:r>
-              <a:rPr lang="en-US" altLang="zh-CN" sz="1200" dirty="0" smtClean="0"/>
-              <a:t>We use transaction memory to improve the performance of parallel programs, and ensure the efficiency of programming.</a:t>
-            </a:r>
+              <a:t>The first is </a:t>
+            </a:r>
+            <a:endParaRPr lang="en-US" altLang="zh-CN" sz="1200" dirty="0" smtClean="0"/>
           </a:p>
           <a:p>
             <a:pPr marL="0" marR="0" lvl="0" indent="0" algn="l" defTabSz="914400" rtl="0" eaLnBrk="1" fontAlgn="auto" latinLnBrk="0" hangingPunct="1">
@@ -1071,47 +1015,15 @@
           <a:p>
             <a:r>
               <a:rPr lang="en-US" altLang="zh-CN" dirty="0" smtClean="0"/>
-              <a:t>The previous methods write log into memory controller before writing data into cache, the core collects meta-log</a:t>
-            </a:r>
-            <a:r>
-              <a:rPr lang="zh-CN" altLang="en-US" dirty="0" smtClean="0"/>
-              <a:t>，</a:t>
-            </a:r>
-            <a:r>
-              <a:rPr lang="en-US" altLang="zh-CN" dirty="0" smtClean="0"/>
-              <a:t>get</a:t>
-            </a:r>
-            <a:r>
-              <a:rPr lang="en-US" altLang="zh-CN" baseline="0" dirty="0" smtClean="0"/>
-              <a:t> old</a:t>
-            </a:r>
-            <a:r>
-              <a:rPr lang="en-US" altLang="zh-CN" dirty="0" smtClean="0"/>
-              <a:t> value</a:t>
-            </a:r>
-            <a:r>
-              <a:rPr lang="zh-CN" altLang="en-US" dirty="0" smtClean="0"/>
-              <a:t>，</a:t>
-            </a:r>
-            <a:r>
-              <a:rPr lang="en-US" altLang="zh-CN" dirty="0" smtClean="0"/>
-              <a:t>write old value into memory controller, then write new</a:t>
-            </a:r>
-            <a:r>
-              <a:rPr lang="en-US" altLang="zh-CN" baseline="0" dirty="0" smtClean="0"/>
-              <a:t> value</a:t>
-            </a:r>
-            <a:r>
-              <a:rPr lang="en-US" altLang="zh-CN" dirty="0" smtClean="0"/>
-              <a:t> into the cache. Writing through old</a:t>
-            </a:r>
-            <a:r>
-              <a:rPr lang="en-US" altLang="zh-CN" baseline="0" dirty="0" smtClean="0"/>
-              <a:t> value</a:t>
-            </a:r>
-            <a:r>
-              <a:rPr lang="en-US" altLang="zh-CN" dirty="0" smtClean="0"/>
-              <a:t> wastes time and spatial locality. </a:t>
+              <a:t>The </a:t>
+            </a:r>
+            <a:r>
+              <a:rPr lang="en-US" altLang="zh-CN" smtClean="0"/>
+              <a:t>previous </a:t>
+            </a:r>
+            <a:r>
+              <a:rPr lang="en-US" altLang="zh-CN" smtClean="0"/>
+              <a:t>methods</a:t>
             </a:r>
             <a:endParaRPr lang="zh-CN" altLang="en-US" dirty="0"/>
           </a:p>
@@ -1543,7 +1455,7 @@
     </p:spTree>
     <p:extLst>
       <p:ext uri="{BB962C8B-B14F-4D97-AF65-F5344CB8AC3E}">
-        <p14:creationId xmlns:p14="http://schemas.microsoft.com/office/powerpoint/2010/main" val="3424242175"/>
+        <p14:creationId xmlns:p14="http://schemas.microsoft.com/office/powerpoint/2010/main" val="5395551"/>
       </p:ext>
     </p:extLst>
   </p:cSld>
@@ -4781,8 +4693,8 @@
         </p:nvSpPr>
         <p:spPr>
           <a:xfrm>
-            <a:off x="4778019" y="1979533"/>
-            <a:ext cx="2005357" cy="1323439"/>
+            <a:off x="2888000" y="2355453"/>
+            <a:ext cx="7021810" cy="1938992"/>
           </a:xfrm>
           <a:prstGeom prst="rect">
             <a:avLst/>
@@ -4790,33 +4702,45 @@
           <a:noFill/>
         </p:spPr>
         <p:txBody>
-          <a:bodyPr wrap="none" rtlCol="0">
+          <a:bodyPr wrap="square" rtlCol="0">
             <a:spAutoFit/>
           </a:bodyPr>
           <a:lstStyle/>
           <a:p>
-            <a:pPr algn="dist"/>
+            <a:r>
+              <a:rPr lang="en-US" altLang="zh-CN" sz="4000" spc="20" dirty="0">
+                <a:latin typeface="Futura Md BT" panose="020B0602020204020303" pitchFamily="34" charset="0"/>
+              </a:rPr>
+              <a:t>Hierarchical Scheduler </a:t>
+            </a:r>
             <a:endParaRPr lang="en-US" altLang="zh-CN" sz="4000" spc="20" dirty="0" smtClean="0">
               <a:latin typeface="Futura Md BT" panose="020B0602020204020303" pitchFamily="34" charset="0"/>
             </a:endParaRPr>
           </a:p>
           <a:p>
-            <a:pPr algn="dist"/>
             <a:r>
               <a:rPr lang="en-US" altLang="zh-CN" sz="4000" spc="20" dirty="0" smtClean="0">
                 <a:latin typeface="Futura Md BT" panose="020B0602020204020303" pitchFamily="34" charset="0"/>
               </a:rPr>
-              <a:t>Lin </a:t>
-            </a:r>
-            <a:r>
-              <a:rPr lang="en-US" altLang="zh-CN" sz="4000" spc="20" dirty="0" smtClean="0">
+              <a:t>For </a:t>
+            </a:r>
+            <a:r>
+              <a:rPr lang="en-US" altLang="zh-CN" sz="4000" spc="20" dirty="0">
                 <a:latin typeface="Futura Md BT" panose="020B0602020204020303" pitchFamily="34" charset="0"/>
               </a:rPr>
-              <a:t>Juyi</a:t>
-            </a:r>
-            <a:endParaRPr lang="en-US" altLang="zh-CN" sz="4000" spc="20" dirty="0" smtClean="0">
+              <a:t>Deep Learning Cluster</a:t>
+            </a:r>
+            <a:endParaRPr lang="en-US" altLang="zh-CN" sz="4000" spc="20" dirty="0">
               <a:latin typeface="Futura Md BT" panose="020B0602020204020303" pitchFamily="34" charset="0"/>
             </a:endParaRPr>
+          </a:p>
+          <a:p>
+            <a:r>
+              <a:rPr lang="en-US" altLang="zh-CN" sz="4000" spc="20" dirty="0">
+                <a:latin typeface="Futura Md BT" panose="020B0602020204020303" pitchFamily="34" charset="0"/>
+              </a:rPr>
+              <a:t>Lin Juyi</a:t>
+            </a:r>
           </a:p>
         </p:txBody>
       </p:sp>
@@ -4849,160 +4773,6 @@
       </p:par>
     </p:tnLst>
   </p:timing>
-</p:sld>
-</file>
-
-<file path=ppt/slides/slide10.xml><?xml version="1.0" encoding="utf-8"?>
-<p:sld xmlns:a="http://schemas.openxmlformats.org/drawingml/2006/main" xmlns:r="http://schemas.openxmlformats.org/officeDocument/2006/relationships" xmlns:p="http://schemas.openxmlformats.org/presentationml/2006/main">
-  <p:cSld>
-    <p:spTree>
-      <p:nvGrpSpPr>
-        <p:cNvPr id="1" name=""/>
-        <p:cNvGrpSpPr/>
-        <p:nvPr/>
-      </p:nvGrpSpPr>
-      <p:grpSpPr>
-        <a:xfrm>
-          <a:off x="0" y="0"/>
-          <a:ext cx="0" cy="0"/>
-          <a:chOff x="0" y="0"/>
-          <a:chExt cx="0" cy="0"/>
-        </a:xfrm>
-      </p:grpSpPr>
-      <p:sp>
-        <p:nvSpPr>
-          <p:cNvPr id="18" name="矩形 17">
-            <a:extLst>
-              <a:ext uri="{FF2B5EF4-FFF2-40B4-BE49-F238E27FC236}">
-                <a16:creationId xmlns:a16="http://schemas.microsoft.com/office/drawing/2014/main" id="{87F7609B-44D8-4A6F-85A8-FC5A2D0C942D}"/>
-              </a:ext>
-            </a:extLst>
-          </p:cNvPr>
-          <p:cNvSpPr/>
-          <p:nvPr/>
-        </p:nvSpPr>
-        <p:spPr>
-          <a:xfrm>
-            <a:off x="-601039" y="4429364"/>
-            <a:ext cx="6004311" cy="45719"/>
-          </a:xfrm>
-          <a:prstGeom prst="rect">
-            <a:avLst/>
-          </a:prstGeom>
-          <a:solidFill>
-            <a:schemeClr val="tx1">
-              <a:lumMod val="75000"/>
-              <a:lumOff val="25000"/>
-            </a:schemeClr>
-          </a:solidFill>
-          <a:ln>
-            <a:noFill/>
-          </a:ln>
-        </p:spPr>
-        <p:style>
-          <a:lnRef idx="2">
-            <a:schemeClr val="accent1">
-              <a:shade val="50000"/>
-            </a:schemeClr>
-          </a:lnRef>
-          <a:fillRef idx="1">
-            <a:schemeClr val="accent1"/>
-          </a:fillRef>
-          <a:effectRef idx="0">
-            <a:schemeClr val="accent1"/>
-          </a:effectRef>
-          <a:fontRef idx="minor">
-            <a:schemeClr val="lt1"/>
-          </a:fontRef>
-        </p:style>
-        <p:txBody>
-          <a:bodyPr rtlCol="0" anchor="ctr"/>
-          <a:lstStyle/>
-          <a:p>
-            <a:pPr algn="ctr"/>
-            <a:endParaRPr lang="zh-CN" altLang="en-US"/>
-          </a:p>
-        </p:txBody>
-      </p:sp>
-      <p:sp>
-        <p:nvSpPr>
-          <p:cNvPr id="22" name="文本框 21">
-            <a:extLst>
-              <a:ext uri="{FF2B5EF4-FFF2-40B4-BE49-F238E27FC236}">
-                <a16:creationId xmlns:a16="http://schemas.microsoft.com/office/drawing/2014/main" id="{E4B5C20D-4A12-483C-8756-87F0BD864146}"/>
-              </a:ext>
-            </a:extLst>
-          </p:cNvPr>
-          <p:cNvSpPr txBox="1"/>
-          <p:nvPr/>
-        </p:nvSpPr>
-        <p:spPr>
-          <a:xfrm>
-            <a:off x="1730807" y="3799134"/>
-            <a:ext cx="3672465" cy="830997"/>
-          </a:xfrm>
-          <a:prstGeom prst="rect">
-            <a:avLst/>
-          </a:prstGeom>
-          <a:noFill/>
-        </p:spPr>
-        <p:txBody>
-          <a:bodyPr vert="horz" wrap="square" rtlCol="0">
-            <a:spAutoFit/>
-          </a:bodyPr>
-          <a:lstStyle>
-            <a:defPPr>
-              <a:defRPr lang="zh-CN"/>
-            </a:defPPr>
-            <a:lvl1pPr>
-              <a:defRPr sz="2000">
-                <a:solidFill>
-                  <a:schemeClr val="bg1"/>
-                </a:solidFill>
-                <a:latin typeface="Verdana" panose="020B0604030504040204" pitchFamily="34" charset="0"/>
-                <a:ea typeface="Verdana" panose="020B0604030504040204" pitchFamily="34" charset="0"/>
-              </a:defRPr>
-            </a:lvl1pPr>
-          </a:lstStyle>
-          <a:p>
-            <a:pPr algn="r"/>
-            <a:r>
-              <a:rPr lang="en-US" altLang="zh-CN" sz="4800" dirty="0">
-                <a:solidFill>
-                  <a:schemeClr val="tx1">
-                    <a:lumMod val="75000"/>
-                    <a:lumOff val="25000"/>
-                  </a:schemeClr>
-                </a:solidFill>
-                <a:latin typeface="Futura Md BT" panose="020B0602020204020303" pitchFamily="34" charset="0"/>
-              </a:rPr>
-              <a:t>Thanks.</a:t>
-            </a:r>
-          </a:p>
-        </p:txBody>
-      </p:sp>
-    </p:spTree>
-    <p:extLst>
-      <p:ext uri="{BB962C8B-B14F-4D97-AF65-F5344CB8AC3E}">
-        <p14:creationId xmlns:p14="http://schemas.microsoft.com/office/powerpoint/2010/main" val="4288645585"/>
-      </p:ext>
-    </p:extLst>
-  </p:cSld>
-  <p:clrMapOvr>
-    <a:masterClrMapping/>
-  </p:clrMapOvr>
-  <mc:AlternateContent xmlns:mc="http://schemas.openxmlformats.org/markup-compatibility/2006" xmlns:p14="http://schemas.microsoft.com/office/powerpoint/2010/main">
-    <mc:Choice Requires="p14">
-      <p:transition p14:dur="100">
-        <p:cut/>
-      </p:transition>
-    </mc:Choice>
-    <mc:Fallback xmlns="">
-      <p:transition>
-        <p:cut/>
-      </p:transition>
-    </mc:Fallback>
-  </mc:AlternateContent>
 </p:sld>
 </file>
 
@@ -5207,19 +4977,6 @@
               <a:buSzPct val="100000"/>
             </a:pPr>
             <a:r>
-              <a:rPr lang="en-US" altLang="zh-CN" sz="2400" b="1" dirty="0">
-                <a:solidFill>
-                  <a:schemeClr val="tx1">
-                    <a:lumMod val="75000"/>
-                    <a:lumOff val="25000"/>
-                  </a:schemeClr>
-                </a:solidFill>
-                <a:latin typeface="+mn-ea"/>
-                <a:cs typeface="Times New Roman" panose="02020603050405020304" pitchFamily="18" charset="0"/>
-              </a:rPr>
-              <a:t>Transactional </a:t>
-            </a:r>
-            <a:r>
               <a:rPr lang="en-US" altLang="zh-CN" sz="2400" b="1" dirty="0" smtClean="0">
                 <a:solidFill>
                   <a:schemeClr val="tx1">
@@ -5230,7 +4987,7 @@
                 <a:latin typeface="+mn-ea"/>
                 <a:cs typeface="Times New Roman" panose="02020603050405020304" pitchFamily="18" charset="0"/>
               </a:rPr>
-              <a:t>Memory</a:t>
+              <a:t>Resource allocation	</a:t>
             </a:r>
             <a:endParaRPr lang="en-US" altLang="zh-CN" sz="2400" b="1" dirty="0">
               <a:solidFill>
@@ -5368,10 +5125,10 @@
       </p:sp>
       <p:sp>
         <p:nvSpPr>
-          <p:cNvPr id="21" name="Rectangle 2">
-            <a:extLst>
-              <a:ext uri="{FF2B5EF4-FFF2-40B4-BE49-F238E27FC236}">
-                <a16:creationId xmlns:a16="http://schemas.microsoft.com/office/drawing/2014/main" id="{7AA38F08-F58F-4917-AF22-25E544208D86}"/>
+          <p:cNvPr id="8" name="Rectangle 2">
+            <a:extLst>
+              <a:ext uri="{FF2B5EF4-FFF2-40B4-BE49-F238E27FC236}">
+                <a16:creationId xmlns:a16="http://schemas.microsoft.com/office/drawing/2014/main" id="{620F5066-ECE0-4D9D-AE2D-91CCA77E27B5}"/>
               </a:ext>
             </a:extLst>
           </p:cNvPr>
@@ -5382,8 +5139,8 @@
         </p:nvSpPr>
         <p:spPr bwMode="auto">
           <a:xfrm>
-            <a:off x="2423112" y="3431641"/>
-            <a:ext cx="7875793" cy="478272"/>
+            <a:off x="2423113" y="3438190"/>
+            <a:ext cx="2961688" cy="461665"/>
           </a:xfrm>
           <a:prstGeom prst="rect">
             <a:avLst/>
@@ -5431,13 +5188,14 @@
           </a:bodyPr>
           <a:lstStyle/>
           <a:p>
-            <a:pPr>
-              <a:lnSpc>
-                <a:spcPts val="3217"/>
-              </a:lnSpc>
+            <a:pPr eaLnBrk="0" fontAlgn="base" hangingPunct="0">
+              <a:spcBef>
+                <a:spcPct val="0"/>
+              </a:spcBef>
               <a:spcAft>
-                <a:spcPts val="600"/>
+                <a:spcPct val="0"/>
               </a:spcAft>
+              <a:buSzPct val="100000"/>
             </a:pPr>
             <a:r>
               <a:rPr lang="en-US" altLang="zh-CN" sz="2400" b="1" dirty="0" smtClean="0">
@@ -5450,7 +5208,168 @@
                 <a:latin typeface="+mn-ea"/>
                 <a:cs typeface="Times New Roman" panose="02020603050405020304" pitchFamily="18" charset="0"/>
               </a:rPr>
-              <a:t>Class Project</a:t>
+              <a:t>Device placement	</a:t>
+            </a:r>
+            <a:endParaRPr lang="en-US" altLang="zh-CN" sz="2400" b="1" dirty="0">
+              <a:solidFill>
+                <a:schemeClr val="tx1">
+                  <a:lumMod val="75000"/>
+                  <a:lumOff val="25000"/>
+                </a:schemeClr>
+              </a:solidFill>
+              <a:latin typeface="+mn-ea"/>
+              <a:cs typeface="Times New Roman" panose="02020603050405020304" pitchFamily="18" charset="0"/>
+            </a:endParaRPr>
+          </a:p>
+        </p:txBody>
+      </p:sp>
+      <p:sp>
+        <p:nvSpPr>
+          <p:cNvPr id="9" name="箭头: V 形 16">
+            <a:extLst>
+              <a:ext uri="{FF2B5EF4-FFF2-40B4-BE49-F238E27FC236}">
+                <a16:creationId xmlns:a16="http://schemas.microsoft.com/office/drawing/2014/main" id="{335C05C4-3643-4444-9C43-5CB6C4CC75FE}"/>
+              </a:ext>
+            </a:extLst>
+          </p:cNvPr>
+          <p:cNvSpPr/>
+          <p:nvPr/>
+        </p:nvSpPr>
+        <p:spPr>
+          <a:xfrm rot="5400000">
+            <a:off x="1547134" y="4732839"/>
+            <a:ext cx="710902" cy="302613"/>
+          </a:xfrm>
+          <a:prstGeom prst="chevron">
+            <a:avLst/>
+          </a:prstGeom>
+          <a:solidFill>
+            <a:schemeClr val="tx1">
+              <a:lumMod val="85000"/>
+              <a:lumOff val="15000"/>
+            </a:schemeClr>
+          </a:solidFill>
+          <a:ln>
+            <a:noFill/>
+          </a:ln>
+        </p:spPr>
+        <p:style>
+          <a:lnRef idx="2">
+            <a:schemeClr val="accent1">
+              <a:shade val="50000"/>
+            </a:schemeClr>
+          </a:lnRef>
+          <a:fillRef idx="1">
+            <a:schemeClr val="accent1"/>
+          </a:fillRef>
+          <a:effectRef idx="0">
+            <a:schemeClr val="accent1"/>
+          </a:effectRef>
+          <a:fontRef idx="minor">
+            <a:schemeClr val="lt1"/>
+          </a:fontRef>
+        </p:style>
+        <p:txBody>
+          <a:bodyPr rtlCol="0" anchor="ctr"/>
+          <a:lstStyle/>
+          <a:p>
+            <a:pPr algn="ctr"/>
+            <a:endParaRPr lang="zh-CN" altLang="en-US">
+              <a:solidFill>
+                <a:schemeClr val="bg1">
+                  <a:lumMod val="85000"/>
+                </a:schemeClr>
+              </a:solidFill>
+            </a:endParaRPr>
+          </a:p>
+        </p:txBody>
+      </p:sp>
+      <p:sp>
+        <p:nvSpPr>
+          <p:cNvPr id="10" name="Rectangle 2">
+            <a:extLst>
+              <a:ext uri="{FF2B5EF4-FFF2-40B4-BE49-F238E27FC236}">
+                <a16:creationId xmlns:a16="http://schemas.microsoft.com/office/drawing/2014/main" id="{620F5066-ECE0-4D9D-AE2D-91CCA77E27B5}"/>
+              </a:ext>
+            </a:extLst>
+          </p:cNvPr>
+          <p:cNvSpPr>
+            <a:spLocks noChangeArrowheads="1"/>
+          </p:cNvSpPr>
+          <p:nvPr/>
+        </p:nvSpPr>
+        <p:spPr bwMode="auto">
+          <a:xfrm>
+            <a:off x="2423112" y="4653312"/>
+            <a:ext cx="3876088" cy="461665"/>
+          </a:xfrm>
+          <a:prstGeom prst="rect">
+            <a:avLst/>
+          </a:prstGeom>
+          <a:noFill/>
+          <a:ln>
+            <a:noFill/>
+          </a:ln>
+          <a:effectLst/>
+          <a:extLst>
+            <a:ext uri="{909E8E84-426E-40DD-AFC4-6F175D3DCCD1}">
+              <a14:hiddenFill xmlns:a14="http://schemas.microsoft.com/office/drawing/2010/main">
+                <a:solidFill>
+                  <a:schemeClr val="accent1"/>
+                </a:solidFill>
+              </a14:hiddenFill>
+            </a:ext>
+            <a:ext uri="{91240B29-F687-4F45-9708-019B960494DF}">
+              <a14:hiddenLine xmlns:a14="http://schemas.microsoft.com/office/drawing/2010/main" w="9525">
+                <a:solidFill>
+                  <a:schemeClr val="tx1"/>
+                </a:solidFill>
+                <a:miter lim="800000"/>
+                <a:headEnd/>
+                <a:tailEnd/>
+              </a14:hiddenLine>
+            </a:ext>
+            <a:ext uri="{AF507438-7753-43E0-B8FC-AC1667EBCBE1}">
+              <a14:hiddenEffects xmlns:a14="http://schemas.microsoft.com/office/drawing/2010/main">
+                <a:effectLst>
+                  <a:outerShdw dist="35921" dir="2700000" algn="ctr" rotWithShape="0">
+                    <a:schemeClr val="bg2"/>
+                  </a:outerShdw>
+                </a:effectLst>
+              </a14:hiddenEffects>
+            </a:ext>
+          </a:extLst>
+        </p:spPr>
+        <p:txBody>
+          <a:bodyPr vert="horz" wrap="square" lIns="91440" tIns="45720" rIns="91440" bIns="45720" numCol="1" anchor="ctr" anchorCtr="0" compatLnSpc="1">
+            <a:prstTxWarp prst="textNoShape">
+              <a:avLst/>
+            </a:prstTxWarp>
+            <a:spAutoFit/>
+          </a:bodyPr>
+          <a:lstStyle/>
+          <a:p>
+            <a:pPr eaLnBrk="0" fontAlgn="base" hangingPunct="0">
+              <a:spcBef>
+                <a:spcPct val="0"/>
+              </a:spcBef>
+              <a:spcAft>
+                <a:spcPct val="0"/>
+              </a:spcAft>
+              <a:buSzPct val="100000"/>
+            </a:pPr>
+            <a:r>
+              <a:rPr lang="en-US" altLang="zh-CN" sz="2400" b="1" dirty="0" smtClean="0">
+                <a:solidFill>
+                  <a:schemeClr val="tx1">
+                    <a:lumMod val="75000"/>
+                    <a:lumOff val="25000"/>
+                  </a:schemeClr>
+                </a:solidFill>
+                <a:latin typeface="+mn-ea"/>
+                <a:cs typeface="Times New Roman" panose="02020603050405020304" pitchFamily="18" charset="0"/>
+              </a:rPr>
+              <a:t>Reinforcement learning	</a:t>
             </a:r>
             <a:endParaRPr lang="en-US" altLang="zh-CN" sz="2400" b="1" dirty="0">
               <a:solidFill>
@@ -7781,55 +7700,7 @@
                 <a:latin typeface="+mn-ea"/>
                 <a:cs typeface="Times New Roman" panose="02020603050405020304" pitchFamily="18" charset="0"/>
               </a:rPr>
-              <a:t>Shortened execution of</a:t>
-            </a:r>
-            <a:r>
-              <a:rPr lang="zh-CN" altLang="en-US" sz="2600" dirty="0">
-                <a:solidFill>
-                  <a:schemeClr val="bg2">
-                    <a:lumMod val="25000"/>
-                  </a:schemeClr>
-                </a:solidFill>
-                <a:latin typeface="+mn-ea"/>
-                <a:cs typeface="Times New Roman" panose="02020603050405020304" pitchFamily="18" charset="0"/>
-              </a:rPr>
-              <a:t> </a:t>
-            </a:r>
-            <a:r>
-              <a:rPr lang="en-US" sz="2600" dirty="0">
-                <a:solidFill>
-                  <a:schemeClr val="bg2">
-                    <a:lumMod val="25000"/>
-                  </a:schemeClr>
-                </a:solidFill>
-                <a:latin typeface="+mn-ea"/>
-                <a:cs typeface="Times New Roman" panose="02020603050405020304" pitchFamily="18" charset="0"/>
-              </a:rPr>
-              <a:t>store</a:t>
-            </a:r>
-            <a:r>
-              <a:rPr lang="zh-CN" altLang="en-US" sz="2600" dirty="0">
-                <a:solidFill>
-                  <a:schemeClr val="bg2">
-                    <a:lumMod val="25000"/>
-                  </a:schemeClr>
-                </a:solidFill>
-                <a:latin typeface="+mn-ea"/>
-                <a:cs typeface="Times New Roman" panose="02020603050405020304" pitchFamily="18" charset="0"/>
-              </a:rPr>
-              <a:t> </a:t>
-            </a:r>
-            <a:r>
-              <a:rPr lang="en-US" sz="2600" dirty="0">
-                <a:solidFill>
-                  <a:schemeClr val="bg2">
-                    <a:lumMod val="25000"/>
-                  </a:schemeClr>
-                </a:solidFill>
-                <a:latin typeface="+mn-ea"/>
-                <a:cs typeface="Times New Roman" panose="02020603050405020304" pitchFamily="18" charset="0"/>
-              </a:rPr>
-              <a:t>instructions.</a:t>
+              <a:t>Shortened </a:t>
             </a:r>
           </a:p>
           <a:p>
@@ -7969,6 +7840,18 @@
               <a:buFont typeface="Wingdings" panose="05000000000000000000" pitchFamily="2" charset="2"/>
               <a:buChar char="l"/>
             </a:pPr>
+            <a:r>
+              <a:rPr lang="en-US" sz="2600" dirty="0" smtClean="0">
+                <a:solidFill>
+                  <a:schemeClr val="bg2">
+                    <a:lumMod val="25000"/>
+                  </a:schemeClr>
+                </a:solidFill>
+                <a:latin typeface="+mn-ea"/>
+                <a:cs typeface="Times New Roman" panose="02020603050405020304" pitchFamily="18" charset="0"/>
+              </a:rPr>
+              <a:t>Inherent.</a:t>
+            </a:r>
             <a:endParaRPr lang="en-US" sz="2600" dirty="0">
               <a:solidFill>
                 <a:schemeClr val="bg2">
@@ -7978,30 +7861,6 @@
               <a:latin typeface="+mn-ea"/>
               <a:cs typeface="Times New Roman" panose="02020603050405020304" pitchFamily="18" charset="0"/>
             </a:endParaRPr>
-          </a:p>
-          <a:p>
-            <a:pPr marL="457200" indent="-457200">
-              <a:lnSpc>
-                <a:spcPts val="3217"/>
-              </a:lnSpc>
-              <a:spcAft>
-                <a:spcPts val="600"/>
-              </a:spcAft>
-              <a:buFont typeface="Wingdings" panose="05000000000000000000" pitchFamily="2" charset="2"/>
-              <a:buChar char="l"/>
-            </a:pPr>
-            <a:r>
-              <a:rPr lang="en-US" sz="2600" dirty="0">
-                <a:solidFill>
-                  <a:schemeClr val="bg2">
-                    <a:lumMod val="25000"/>
-                  </a:schemeClr>
-                </a:solidFill>
-                <a:latin typeface="+mn-ea"/>
-                <a:cs typeface="Times New Roman" panose="02020603050405020304" pitchFamily="18" charset="0"/>
-              </a:rPr>
-              <a:t>Inherent support of log coalescing.</a:t>
-            </a:r>
           </a:p>
           <a:p>
             <a:pPr marL="457200" indent="-457200">
@@ -8250,13 +8109,16 @@
               <a:t>Learn </a:t>
             </a:r>
             <a:r>
-              <a:rPr lang="en-US" altLang="zh-CN" sz="2300" b="1" dirty="0">
+              <a:rPr lang="en-US" altLang="zh-CN" sz="2300" b="1" dirty="0" smtClean="0">
                 <a:solidFill>
-                  <a:srgbClr val="C00000"/>
+                  <a:schemeClr val="tx1">
+                    <a:lumMod val="75000"/>
+                    <a:lumOff val="25000"/>
+                  </a:schemeClr>
                 </a:solidFill>
                 <a:latin typeface="+mn-lt"/>
               </a:rPr>
-              <a:t>gem5</a:t>
+              <a:t>and </a:t>
             </a:r>
             <a:r>
               <a:rPr lang="en-US" altLang="zh-CN" sz="2300" b="1" dirty="0">
@@ -8268,7 +8130,7 @@
                 </a:solidFill>
                 <a:latin typeface="+mn-lt"/>
               </a:rPr>
-              <a:t> and the </a:t>
+              <a:t>the </a:t>
             </a:r>
             <a:r>
               <a:rPr lang="en-US" altLang="zh-CN" sz="2300" b="1" dirty="0">
@@ -8317,54 +8179,6 @@
           </a:p>
         </p:txBody>
       </p:sp>
-      <p:pic>
-        <p:nvPicPr>
-          <p:cNvPr id="2" name="图片 1"/>
-          <p:cNvPicPr>
-            <a:picLocks noChangeAspect="1"/>
-          </p:cNvPicPr>
-          <p:nvPr/>
-        </p:nvPicPr>
-        <p:blipFill>
-          <a:blip r:embed="rId3"/>
-          <a:stretch>
-            <a:fillRect/>
-          </a:stretch>
-        </p:blipFill>
-        <p:spPr>
-          <a:xfrm>
-            <a:off x="196697" y="2690396"/>
-            <a:ext cx="5931205" cy="3854648"/>
-          </a:xfrm>
-          <a:prstGeom prst="rect">
-            <a:avLst/>
-          </a:prstGeom>
-        </p:spPr>
-      </p:pic>
-      <p:pic>
-        <p:nvPicPr>
-          <p:cNvPr id="3" name="图片 2"/>
-          <p:cNvPicPr>
-            <a:picLocks noChangeAspect="1"/>
-          </p:cNvPicPr>
-          <p:nvPr/>
-        </p:nvPicPr>
-        <p:blipFill>
-          <a:blip r:embed="rId4"/>
-          <a:stretch>
-            <a:fillRect/>
-          </a:stretch>
-        </p:blipFill>
-        <p:spPr>
-          <a:xfrm>
-            <a:off x="6195528" y="3024756"/>
-            <a:ext cx="5815677" cy="2667383"/>
-          </a:xfrm>
-          <a:prstGeom prst="rect">
-            <a:avLst/>
-          </a:prstGeom>
-        </p:spPr>
-      </p:pic>
     </p:spTree>
     <p:extLst>
       <p:ext uri="{BB962C8B-B14F-4D97-AF65-F5344CB8AC3E}">
@@ -8428,8 +8242,8 @@
         </p:nvSpPr>
         <p:spPr>
           <a:xfrm>
-            <a:off x="-83801" y="668559"/>
-            <a:ext cx="6170240" cy="45719"/>
+            <a:off x="-601039" y="4429364"/>
+            <a:ext cx="6004311" cy="45719"/>
           </a:xfrm>
           <a:prstGeom prst="rect">
             <a:avLst/>
@@ -8440,6 +8254,9 @@
               <a:lumOff val="25000"/>
             </a:schemeClr>
           </a:solidFill>
+          <a:ln>
+            <a:noFill/>
+          </a:ln>
         </p:spPr>
         <p:style>
           <a:lnRef idx="2">
@@ -8480,8 +8297,8 @@
         </p:nvSpPr>
         <p:spPr>
           <a:xfrm>
-            <a:off x="133666" y="268002"/>
-            <a:ext cx="5952773" cy="446276"/>
+            <a:off x="1730807" y="3799134"/>
+            <a:ext cx="3672465" cy="830997"/>
           </a:xfrm>
           <a:prstGeom prst="rect">
             <a:avLst/>
@@ -8509,416 +8326,24 @@
           <a:p>
             <a:pPr algn="r"/>
             <a:r>
-              <a:rPr lang="en-US" altLang="zh-CN" sz="2300" b="1" dirty="0">
+              <a:rPr lang="en-US" altLang="zh-CN" sz="4800" dirty="0">
                 <a:solidFill>
                   <a:schemeClr val="tx1">
                     <a:lumMod val="75000"/>
                     <a:lumOff val="25000"/>
                   </a:schemeClr>
                 </a:solidFill>
-                <a:latin typeface="+mn-ea"/>
-                <a:ea typeface="+mn-ea"/>
+                <a:latin typeface="Futura Md BT" panose="020B0602020204020303" pitchFamily="34" charset="0"/>
               </a:rPr>
-              <a:t>C</a:t>
-            </a:r>
-            <a:r>
-              <a:rPr lang="en-US" altLang="zh-CN" sz="2300" b="1" dirty="0" smtClean="0">
-                <a:solidFill>
-                  <a:schemeClr val="tx1">
-                    <a:lumMod val="75000"/>
-                    <a:lumOff val="25000"/>
-                  </a:schemeClr>
-                </a:solidFill>
-                <a:latin typeface="+mn-ea"/>
-                <a:ea typeface="+mn-ea"/>
-              </a:rPr>
-              <a:t>lass </a:t>
-            </a:r>
-            <a:r>
-              <a:rPr lang="en-US" altLang="zh-CN" sz="2300" b="1" dirty="0">
-                <a:solidFill>
-                  <a:schemeClr val="tx1">
-                    <a:lumMod val="75000"/>
-                    <a:lumOff val="25000"/>
-                  </a:schemeClr>
-                </a:solidFill>
-                <a:latin typeface="+mn-ea"/>
-                <a:ea typeface="+mn-ea"/>
-              </a:rPr>
-              <a:t>P</a:t>
-            </a:r>
-            <a:r>
-              <a:rPr lang="en-US" altLang="zh-CN" sz="2300" b="1" dirty="0" smtClean="0">
-                <a:solidFill>
-                  <a:schemeClr val="tx1">
-                    <a:lumMod val="75000"/>
-                    <a:lumOff val="25000"/>
-                  </a:schemeClr>
-                </a:solidFill>
-                <a:latin typeface="+mn-ea"/>
-                <a:ea typeface="+mn-ea"/>
-              </a:rPr>
-              <a:t>roject</a:t>
-            </a:r>
-            <a:endParaRPr lang="en-US" altLang="zh-CN" sz="2300" b="1" dirty="0">
-              <a:solidFill>
-                <a:schemeClr val="tx1">
-                  <a:lumMod val="75000"/>
-                  <a:lumOff val="25000"/>
-                </a:schemeClr>
-              </a:solidFill>
-              <a:latin typeface="+mn-ea"/>
-              <a:ea typeface="+mn-ea"/>
-            </a:endParaRPr>
-          </a:p>
-        </p:txBody>
-      </p:sp>
-      <p:sp>
-        <p:nvSpPr>
-          <p:cNvPr id="10" name="Object 6">
-            <a:extLst>
-              <a:ext uri="{FF2B5EF4-FFF2-40B4-BE49-F238E27FC236}">
-                <a16:creationId xmlns:a16="http://schemas.microsoft.com/office/drawing/2014/main" id="{BB04409B-C881-4759-8086-04E589597079}"/>
-              </a:ext>
-            </a:extLst>
-          </p:cNvPr>
-          <p:cNvSpPr/>
-          <p:nvPr/>
-        </p:nvSpPr>
-        <p:spPr>
-          <a:xfrm>
-            <a:off x="1569746" y="3759475"/>
-            <a:ext cx="133317" cy="133317"/>
-          </a:xfrm>
-          <a:prstGeom prst="ellipse">
-            <a:avLst/>
-          </a:prstGeom>
-          <a:solidFill>
-            <a:srgbClr val="C00000"/>
-          </a:solidFill>
-        </p:spPr>
-      </p:sp>
-      <p:sp>
-        <p:nvSpPr>
-          <p:cNvPr id="12" name="Object 8">
-            <a:extLst>
-              <a:ext uri="{FF2B5EF4-FFF2-40B4-BE49-F238E27FC236}">
-                <a16:creationId xmlns:a16="http://schemas.microsoft.com/office/drawing/2014/main" id="{A2A5A1A6-9BE5-48C4-8EAE-8EFE183E0CC8}"/>
-              </a:ext>
-            </a:extLst>
-          </p:cNvPr>
-          <p:cNvSpPr/>
-          <p:nvPr/>
-        </p:nvSpPr>
-        <p:spPr>
-          <a:xfrm>
-            <a:off x="1569746" y="4235690"/>
-            <a:ext cx="8969917" cy="2252978"/>
-          </a:xfrm>
-          <a:prstGeom prst="rect">
-            <a:avLst/>
-          </a:prstGeom>
-          <a:noFill/>
-        </p:spPr>
-        <p:txBody>
-          <a:bodyPr wrap="square" lIns="0" tIns="0" rIns="0" bIns="0" rtlCol="0" anchor="t"/>
-          <a:lstStyle/>
-          <a:p>
-            <a:r>
-              <a:rPr lang="en-US" altLang="zh-CN" sz="2500" dirty="0">
-                <a:solidFill>
-                  <a:schemeClr val="tx1">
-                    <a:lumMod val="65000"/>
-                    <a:lumOff val="35000"/>
-                  </a:schemeClr>
-                </a:solidFill>
-                <a:latin typeface="+mn-ea"/>
-                <a:cs typeface="Times New Roman" panose="02020603050405020304" pitchFamily="18" charset="0"/>
-              </a:rPr>
-              <a:t>I used JavaFX as </a:t>
-            </a:r>
-            <a:r>
-              <a:rPr lang="en-US" altLang="zh-CN" sz="2500" dirty="0" smtClean="0">
-                <a:solidFill>
-                  <a:schemeClr val="tx1">
-                    <a:lumMod val="65000"/>
-                    <a:lumOff val="35000"/>
-                  </a:schemeClr>
-                </a:solidFill>
-                <a:latin typeface="+mn-ea"/>
-                <a:cs typeface="Times New Roman" panose="02020603050405020304" pitchFamily="18" charset="0"/>
-              </a:rPr>
-              <a:t>UI, implemented </a:t>
-            </a:r>
-            <a:r>
-              <a:rPr lang="en-US" altLang="zh-CN" sz="2500" dirty="0">
-                <a:solidFill>
-                  <a:schemeClr val="tx1">
-                    <a:lumMod val="65000"/>
-                    <a:lumOff val="35000"/>
-                  </a:schemeClr>
-                </a:solidFill>
-                <a:latin typeface="+mn-ea"/>
-                <a:cs typeface="Times New Roman" panose="02020603050405020304" pitchFamily="18" charset="0"/>
-              </a:rPr>
-              <a:t>an online chat room, which has group chat\private chat\login\register, and other functions</a:t>
-            </a:r>
-            <a:r>
-              <a:rPr lang="zh-CN" altLang="zh-CN" sz="2500" dirty="0" smtClean="0">
-                <a:solidFill>
-                  <a:schemeClr val="tx1">
-                    <a:lumMod val="65000"/>
-                    <a:lumOff val="35000"/>
-                  </a:schemeClr>
-                </a:solidFill>
-                <a:latin typeface="+mn-ea"/>
-                <a:cs typeface="Times New Roman" panose="02020603050405020304" pitchFamily="18" charset="0"/>
-              </a:rPr>
-              <a:t>。</a:t>
-            </a:r>
-            <a:r>
-              <a:rPr lang="en-US" altLang="zh-CN" sz="2500" dirty="0" smtClean="0">
-                <a:solidFill>
-                  <a:schemeClr val="tx1">
-                    <a:lumMod val="65000"/>
-                    <a:lumOff val="35000"/>
-                  </a:schemeClr>
-                </a:solidFill>
-                <a:latin typeface="+mn-ea"/>
-                <a:cs typeface="Times New Roman" panose="02020603050405020304" pitchFamily="18" charset="0"/>
-              </a:rPr>
-              <a:t>It supports multiple clients connection.</a:t>
-            </a:r>
-            <a:endParaRPr lang="zh-CN" altLang="zh-CN" sz="2500" dirty="0">
-              <a:solidFill>
-                <a:schemeClr val="tx1">
-                  <a:lumMod val="65000"/>
-                  <a:lumOff val="35000"/>
-                </a:schemeClr>
-              </a:solidFill>
-              <a:latin typeface="+mn-ea"/>
-              <a:cs typeface="Times New Roman" panose="02020603050405020304" pitchFamily="18" charset="0"/>
-            </a:endParaRPr>
-          </a:p>
-        </p:txBody>
-      </p:sp>
-      <p:sp>
-        <p:nvSpPr>
-          <p:cNvPr id="16" name="Object 4">
-            <a:extLst>
-              <a:ext uri="{FF2B5EF4-FFF2-40B4-BE49-F238E27FC236}">
-                <a16:creationId xmlns:a16="http://schemas.microsoft.com/office/drawing/2014/main" id="{5B9FBF90-29DB-486D-9F07-20FF3DCF1E99}"/>
-              </a:ext>
-            </a:extLst>
-          </p:cNvPr>
-          <p:cNvSpPr/>
-          <p:nvPr/>
-        </p:nvSpPr>
-        <p:spPr>
-          <a:xfrm>
-            <a:off x="1845902" y="3622418"/>
-            <a:ext cx="4715182" cy="730347"/>
-          </a:xfrm>
-          <a:prstGeom prst="rect">
-            <a:avLst/>
-          </a:prstGeom>
-          <a:noFill/>
-        </p:spPr>
-        <p:txBody>
-          <a:bodyPr wrap="square" lIns="0" tIns="0" rIns="0" bIns="0" rtlCol="0" anchor="t"/>
-          <a:lstStyle/>
-          <a:p>
-            <a:pPr>
-              <a:lnSpc>
-                <a:spcPts val="3217"/>
-              </a:lnSpc>
-              <a:spcAft>
-                <a:spcPts val="600"/>
-              </a:spcAft>
-            </a:pPr>
-            <a:r>
-              <a:rPr lang="en-US" altLang="zh-CN" sz="2800" b="1" dirty="0" smtClean="0">
-                <a:solidFill>
-                  <a:schemeClr val="tx1">
-                    <a:lumMod val="65000"/>
-                    <a:lumOff val="35000"/>
-                  </a:schemeClr>
-                </a:solidFill>
-                <a:latin typeface="+mn-ea"/>
-                <a:cs typeface="Times New Roman" panose="02020603050405020304" pitchFamily="18" charset="0"/>
-              </a:rPr>
-              <a:t>Java Application</a:t>
-            </a:r>
-            <a:endParaRPr lang="en-US" sz="2800" b="1" dirty="0">
-              <a:solidFill>
-                <a:schemeClr val="tx1">
-                  <a:lumMod val="65000"/>
-                  <a:lumOff val="35000"/>
-                </a:schemeClr>
-              </a:solidFill>
-              <a:latin typeface="+mn-ea"/>
-              <a:cs typeface="Times New Roman" panose="02020603050405020304" pitchFamily="18" charset="0"/>
-            </a:endParaRPr>
-          </a:p>
-        </p:txBody>
-      </p:sp>
-      <p:sp>
-        <p:nvSpPr>
-          <p:cNvPr id="11" name="Object 6">
-            <a:extLst>
-              <a:ext uri="{FF2B5EF4-FFF2-40B4-BE49-F238E27FC236}">
-                <a16:creationId xmlns:a16="http://schemas.microsoft.com/office/drawing/2014/main" id="{BB04409B-C881-4759-8086-04E589597079}"/>
-              </a:ext>
-            </a:extLst>
-          </p:cNvPr>
-          <p:cNvSpPr/>
-          <p:nvPr/>
-        </p:nvSpPr>
-        <p:spPr>
-          <a:xfrm>
-            <a:off x="1569747" y="1735516"/>
-            <a:ext cx="133317" cy="133317"/>
-          </a:xfrm>
-          <a:prstGeom prst="ellipse">
-            <a:avLst/>
-          </a:prstGeom>
-          <a:solidFill>
-            <a:srgbClr val="C00000"/>
-          </a:solidFill>
-        </p:spPr>
-      </p:sp>
-      <p:sp>
-        <p:nvSpPr>
-          <p:cNvPr id="15" name="Object 8">
-            <a:extLst>
-              <a:ext uri="{FF2B5EF4-FFF2-40B4-BE49-F238E27FC236}">
-                <a16:creationId xmlns:a16="http://schemas.microsoft.com/office/drawing/2014/main" id="{A2A5A1A6-9BE5-48C4-8EAE-8EFE183E0CC8}"/>
-              </a:ext>
-            </a:extLst>
-          </p:cNvPr>
-          <p:cNvSpPr/>
-          <p:nvPr/>
-        </p:nvSpPr>
-        <p:spPr>
-          <a:xfrm>
-            <a:off x="1636405" y="2133929"/>
-            <a:ext cx="8969917" cy="2252978"/>
-          </a:xfrm>
-          <a:prstGeom prst="rect">
-            <a:avLst/>
-          </a:prstGeom>
-          <a:noFill/>
-        </p:spPr>
-        <p:txBody>
-          <a:bodyPr wrap="square" lIns="0" tIns="0" rIns="0" bIns="0" rtlCol="0" anchor="t"/>
-          <a:lstStyle/>
-          <a:p>
-            <a:r>
-              <a:rPr lang="en-US" altLang="zh-CN" sz="2500" dirty="0" smtClean="0">
-                <a:solidFill>
-                  <a:schemeClr val="tx1">
-                    <a:lumMod val="65000"/>
-                    <a:lumOff val="35000"/>
-                  </a:schemeClr>
-                </a:solidFill>
-                <a:latin typeface="+mn-ea"/>
-                <a:cs typeface="Times New Roman" panose="02020603050405020304" pitchFamily="18" charset="0"/>
-              </a:rPr>
-              <a:t>I implement a </a:t>
-            </a:r>
-            <a:r>
-              <a:rPr lang="en-US" altLang="zh-CN" sz="2500" dirty="0">
-                <a:solidFill>
-                  <a:schemeClr val="tx1">
-                    <a:lumMod val="65000"/>
-                    <a:lumOff val="35000"/>
-                  </a:schemeClr>
-                </a:solidFill>
-                <a:latin typeface="+mn-ea"/>
-                <a:cs typeface="Times New Roman" panose="02020603050405020304" pitchFamily="18" charset="0"/>
-              </a:rPr>
-              <a:t>particle filter algorithm to track the specified target</a:t>
-            </a:r>
-            <a:r>
-              <a:rPr lang="en-US" altLang="zh-CN" sz="2500" dirty="0" smtClean="0">
-                <a:solidFill>
-                  <a:schemeClr val="tx1">
-                    <a:lumMod val="65000"/>
-                    <a:lumOff val="35000"/>
-                  </a:schemeClr>
-                </a:solidFill>
-                <a:latin typeface="+mn-ea"/>
-                <a:cs typeface="Times New Roman" panose="02020603050405020304" pitchFamily="18" charset="0"/>
-              </a:rPr>
-              <a:t>.</a:t>
-            </a:r>
-          </a:p>
-        </p:txBody>
-      </p:sp>
-      <p:sp>
-        <p:nvSpPr>
-          <p:cNvPr id="17" name="Object 4">
-            <a:extLst>
-              <a:ext uri="{FF2B5EF4-FFF2-40B4-BE49-F238E27FC236}">
-                <a16:creationId xmlns:a16="http://schemas.microsoft.com/office/drawing/2014/main" id="{5B9FBF90-29DB-486D-9F07-20FF3DCF1E99}"/>
-              </a:ext>
-            </a:extLst>
-          </p:cNvPr>
-          <p:cNvSpPr/>
-          <p:nvPr/>
-        </p:nvSpPr>
-        <p:spPr>
-          <a:xfrm>
-            <a:off x="1845902" y="1568333"/>
-            <a:ext cx="4715182" cy="730347"/>
-          </a:xfrm>
-          <a:prstGeom prst="rect">
-            <a:avLst/>
-          </a:prstGeom>
-          <a:noFill/>
-        </p:spPr>
-        <p:txBody>
-          <a:bodyPr wrap="square" lIns="0" tIns="0" rIns="0" bIns="0" rtlCol="0" anchor="t"/>
-          <a:lstStyle/>
-          <a:p>
-            <a:pPr>
-              <a:lnSpc>
-                <a:spcPts val="3217"/>
-              </a:lnSpc>
-              <a:spcAft>
-                <a:spcPts val="600"/>
-              </a:spcAft>
-            </a:pPr>
-            <a:r>
-              <a:rPr lang="en-US" altLang="zh-CN" sz="2800" b="1" dirty="0" smtClean="0">
-                <a:solidFill>
-                  <a:schemeClr val="tx1">
-                    <a:lumMod val="65000"/>
-                    <a:lumOff val="35000"/>
-                  </a:schemeClr>
-                </a:solidFill>
-                <a:latin typeface="+mn-ea"/>
-                <a:cs typeface="Times New Roman" panose="02020603050405020304" pitchFamily="18" charset="0"/>
-              </a:rPr>
-              <a:t>AI project</a:t>
-            </a:r>
-            <a:endParaRPr lang="en-US" sz="2800" b="1" dirty="0">
-              <a:solidFill>
-                <a:schemeClr val="tx1">
-                  <a:lumMod val="65000"/>
-                  <a:lumOff val="35000"/>
-                </a:schemeClr>
-              </a:solidFill>
-              <a:latin typeface="+mn-ea"/>
-              <a:cs typeface="Times New Roman" panose="02020603050405020304" pitchFamily="18" charset="0"/>
-            </a:endParaRPr>
+              <a:t>Thanks.</a:t>
+            </a:r>
           </a:p>
         </p:txBody>
       </p:sp>
     </p:spTree>
     <p:extLst>
       <p:ext uri="{BB962C8B-B14F-4D97-AF65-F5344CB8AC3E}">
-        <p14:creationId xmlns:p14="http://schemas.microsoft.com/office/powerpoint/2010/main" val="1313758202"/>
+        <p14:creationId xmlns:p14="http://schemas.microsoft.com/office/powerpoint/2010/main" val="4288645585"/>
       </p:ext>
     </p:extLst>
   </p:cSld>
@@ -8937,13 +8362,6 @@
       </p:transition>
     </mc:Fallback>
   </mc:AlternateContent>
-  <p:timing>
-    <p:tnLst>
-      <p:par>
-        <p:cTn id="1" dur="indefinite" restart="never" nodeType="tmRoot"/>
-      </p:par>
-    </p:tnLst>
-  </p:timing>
 </p:sld>
 </file>
 

--- a/final report.pptx
+++ b/final report.pptx
@@ -186,7 +186,6 @@
   <c:clrMapOvr bg1="lt1" tx1="dk1" bg2="lt2" tx2="dk2" accent1="accent1" accent2="accent2" accent3="accent3" accent4="accent4" accent5="accent5" accent6="accent6" hlink="hlink" folHlink="folHlink"/>
   <c:chart>
     <c:title>
-      <c:layout/>
       <c:overlay val="0"/>
       <c:spPr>
         <a:noFill/>
@@ -1074,7 +1073,7 @@
           <a:p>
             <a:fld id="{042A0892-48F5-400D-9A65-6168D6414168}" type="datetimeFigureOut">
               <a:rPr lang="zh-CN" altLang="en-US" smtClean="0"/>
-              <a:t>2021/8/29</a:t>
+              <a:t>2021/9/9</a:t>
             </a:fld>
             <a:endParaRPr lang="zh-CN" altLang="en-US"/>
           </a:p>
@@ -1404,11 +1403,7 @@
             </a:pPr>
             <a:r>
               <a:rPr lang="en-US" altLang="zh-CN" dirty="0" smtClean="0"/>
-              <a:t>Good afternoon, professor! </a:t>
-            </a:r>
-            <a:r>
-              <a:rPr lang="en-US" altLang="zh-CN" dirty="0" smtClean="0"/>
-              <a:t>I am glad to present my summer research project here. The topic of my project is hierarchical reinforcement learning for allocating GPU resources and place jobs. </a:t>
+              <a:t>Good afternoon, professor! I am glad to present my summer research project here. The topic of my project is hierarchical reinforcement learning for allocating GPU resources and place jobs. </a:t>
             </a:r>
             <a:endParaRPr lang="zh-CN" altLang="en-US" sz="1200" spc="300" dirty="0">
               <a:solidFill>
@@ -2959,7 +2954,7 @@
           <a:p>
             <a:fld id="{E650F6C9-59DB-45A4-B5F3-4BA38C0FBD5F}" type="datetimeFigureOut">
               <a:rPr lang="zh-CN" altLang="en-US" smtClean="0"/>
-              <a:t>2021/8/29</a:t>
+              <a:t>2021/9/9</a:t>
             </a:fld>
             <a:endParaRPr lang="zh-CN" altLang="en-US"/>
           </a:p>
@@ -3157,7 +3152,7 @@
           <a:p>
             <a:fld id="{E650F6C9-59DB-45A4-B5F3-4BA38C0FBD5F}" type="datetimeFigureOut">
               <a:rPr lang="zh-CN" altLang="en-US" smtClean="0"/>
-              <a:t>2021/8/29</a:t>
+              <a:t>2021/9/9</a:t>
             </a:fld>
             <a:endParaRPr lang="zh-CN" altLang="en-US"/>
           </a:p>
@@ -3365,7 +3360,7 @@
           <a:p>
             <a:fld id="{E650F6C9-59DB-45A4-B5F3-4BA38C0FBD5F}" type="datetimeFigureOut">
               <a:rPr lang="zh-CN" altLang="en-US" smtClean="0"/>
-              <a:t>2021/8/29</a:t>
+              <a:t>2021/9/9</a:t>
             </a:fld>
             <a:endParaRPr lang="zh-CN" altLang="en-US"/>
           </a:p>
@@ -3563,7 +3558,7 @@
           <a:p>
             <a:fld id="{E650F6C9-59DB-45A4-B5F3-4BA38C0FBD5F}" type="datetimeFigureOut">
               <a:rPr lang="zh-CN" altLang="en-US" smtClean="0"/>
-              <a:t>2021/8/29</a:t>
+              <a:t>2021/9/9</a:t>
             </a:fld>
             <a:endParaRPr lang="zh-CN" altLang="en-US"/>
           </a:p>
@@ -3838,7 +3833,7 @@
           <a:p>
             <a:fld id="{E650F6C9-59DB-45A4-B5F3-4BA38C0FBD5F}" type="datetimeFigureOut">
               <a:rPr lang="zh-CN" altLang="en-US" smtClean="0"/>
-              <a:t>2021/8/29</a:t>
+              <a:t>2021/9/9</a:t>
             </a:fld>
             <a:endParaRPr lang="zh-CN" altLang="en-US"/>
           </a:p>
@@ -4103,7 +4098,7 @@
           <a:p>
             <a:fld id="{E650F6C9-59DB-45A4-B5F3-4BA38C0FBD5F}" type="datetimeFigureOut">
               <a:rPr lang="zh-CN" altLang="en-US" smtClean="0"/>
-              <a:t>2021/8/29</a:t>
+              <a:t>2021/9/9</a:t>
             </a:fld>
             <a:endParaRPr lang="zh-CN" altLang="en-US"/>
           </a:p>
@@ -4515,7 +4510,7 @@
           <a:p>
             <a:fld id="{E650F6C9-59DB-45A4-B5F3-4BA38C0FBD5F}" type="datetimeFigureOut">
               <a:rPr lang="zh-CN" altLang="en-US" smtClean="0"/>
-              <a:t>2021/8/29</a:t>
+              <a:t>2021/9/9</a:t>
             </a:fld>
             <a:endParaRPr lang="zh-CN" altLang="en-US"/>
           </a:p>
@@ -4656,7 +4651,7 @@
           <a:p>
             <a:fld id="{E650F6C9-59DB-45A4-B5F3-4BA38C0FBD5F}" type="datetimeFigureOut">
               <a:rPr lang="zh-CN" altLang="en-US" smtClean="0"/>
-              <a:t>2021/8/29</a:t>
+              <a:t>2021/9/9</a:t>
             </a:fld>
             <a:endParaRPr lang="zh-CN" altLang="en-US"/>
           </a:p>
@@ -4769,7 +4764,7 @@
           <a:p>
             <a:fld id="{E650F6C9-59DB-45A4-B5F3-4BA38C0FBD5F}" type="datetimeFigureOut">
               <a:rPr lang="zh-CN" altLang="en-US" smtClean="0"/>
-              <a:t>2021/8/29</a:t>
+              <a:t>2021/9/9</a:t>
             </a:fld>
             <a:endParaRPr lang="zh-CN" altLang="en-US"/>
           </a:p>
@@ -5080,7 +5075,7 @@
           <a:p>
             <a:fld id="{E650F6C9-59DB-45A4-B5F3-4BA38C0FBD5F}" type="datetimeFigureOut">
               <a:rPr lang="zh-CN" altLang="en-US" smtClean="0"/>
-              <a:t>2021/8/29</a:t>
+              <a:t>2021/9/9</a:t>
             </a:fld>
             <a:endParaRPr lang="zh-CN" altLang="en-US"/>
           </a:p>
@@ -5368,7 +5363,7 @@
           <a:p>
             <a:fld id="{E650F6C9-59DB-45A4-B5F3-4BA38C0FBD5F}" type="datetimeFigureOut">
               <a:rPr lang="zh-CN" altLang="en-US" smtClean="0"/>
-              <a:t>2021/8/29</a:t>
+              <a:t>2021/9/9</a:t>
             </a:fld>
             <a:endParaRPr lang="zh-CN" altLang="en-US"/>
           </a:p>
@@ -5609,7 +5604,7 @@
           <a:p>
             <a:fld id="{E650F6C9-59DB-45A4-B5F3-4BA38C0FBD5F}" type="datetimeFigureOut">
               <a:rPr lang="zh-CN" altLang="en-US" smtClean="0"/>
-              <a:t>2021/8/29</a:t>
+              <a:t>2021/9/9</a:t>
             </a:fld>
             <a:endParaRPr lang="zh-CN" altLang="en-US"/>
           </a:p>
@@ -6218,18 +6213,7 @@
                 <a:ea typeface="微软雅黑" panose="020B0503020204020204" pitchFamily="34" charset="-122"/>
                 <a:sym typeface="+mn-ea"/>
               </a:rPr>
-              <a:t>Juyi </a:t>
-            </a:r>
-            <a:r>
-              <a:rPr lang="en-US" altLang="zh-CN" sz="2400" dirty="0" smtClean="0">
-                <a:solidFill>
-                  <a:schemeClr val="accent1"/>
-                </a:solidFill>
-                <a:latin typeface="微软雅黑" panose="020B0503020204020204" pitchFamily="34" charset="-122"/>
-                <a:ea typeface="微软雅黑" panose="020B0503020204020204" pitchFamily="34" charset="-122"/>
-                <a:sym typeface="+mn-ea"/>
-              </a:rPr>
-              <a:t>Lin</a:t>
+              <a:t>Juyi Lin</a:t>
             </a:r>
           </a:p>
           <a:p>
@@ -9552,15 +9536,6 @@
                         </a:rPr>
                         <a:t>A HIERARCHICAL MODEL FOR DEVICE PLACEMENT 2018</a:t>
                       </a:r>
-                      <a:endParaRPr lang="en-US" altLang="zh-CN" sz="1800" b="1" i="0" kern="1200" dirty="0" smtClean="0">
-                        <a:solidFill>
-                          <a:schemeClr val="dk1"/>
-                        </a:solidFill>
-                        <a:effectLst/>
-                        <a:latin typeface="+mn-lt"/>
-                        <a:ea typeface="+mn-ea"/>
-                        <a:cs typeface="+mn-cs"/>
-                      </a:endParaRPr>
                     </a:p>
                   </a:txBody>
                   <a:tcPr/>
@@ -10840,16 +10815,7 @@
                 </a:solidFill>
                 <a:latin typeface="+mn-lt"/>
               </a:rPr>
-              <a:t>Design the hierarchical </a:t>
-            </a:r>
-            <a:r>
-              <a:rPr lang="en-US" altLang="zh-CN" sz="2300" b="1" dirty="0" smtClean="0">
-                <a:solidFill>
-                  <a:schemeClr val="tx1"/>
-                </a:solidFill>
-                <a:latin typeface="+mn-lt"/>
-              </a:rPr>
-              <a:t>method</a:t>
+              <a:t>Design the hierarchical method</a:t>
             </a:r>
           </a:p>
           <a:p>
@@ -13292,8 +13258,8 @@
           </a:p>
         </p:txBody>
       </p:sp>
-      <mc:AlternateContent xmlns:mc="http://schemas.openxmlformats.org/markup-compatibility/2006">
-        <mc:Choice xmlns:a14="http://schemas.microsoft.com/office/drawing/2010/main" Requires="a14">
+      <mc:AlternateContent xmlns:mc="http://schemas.openxmlformats.org/markup-compatibility/2006" xmlns:a14="http://schemas.microsoft.com/office/drawing/2010/main">
+        <mc:Choice Requires="a14">
           <p:sp>
             <p:nvSpPr>
               <p:cNvPr id="6" name="文本框 5">
@@ -13391,19 +13357,7 @@
                               </a:solidFill>
                               <a:latin typeface="Cambria Math" panose="02040503050406030204" pitchFamily="18" charset="0"/>
                             </a:rPr>
-                            <m:t>𝒕𝒉𝒓𝒐𝒖𝒈𝒉𝒑𝒖</m:t>
-                          </m:r>
-                          <m:r>
-                            <a:rPr lang="en-US" altLang="zh-CN" sz="2300" b="1" i="1">
-                              <a:solidFill>
-                                <a:schemeClr val="tx1">
-                                  <a:lumMod val="75000"/>
-                                  <a:lumOff val="25000"/>
-                                </a:schemeClr>
-                              </a:solidFill>
-                              <a:latin typeface="Cambria Math" panose="02040503050406030204" pitchFamily="18" charset="0"/>
-                            </a:rPr>
-                            <m:t>𝒕</m:t>
+                            <m:t>𝒕𝒉𝒓𝒐𝒖𝒈𝒉𝒑𝒖𝒕</m:t>
                           </m:r>
                         </m:num>
                         <m:den>
@@ -13576,7 +13530,7 @@
             </p:txBody>
           </p:sp>
         </mc:Choice>
-        <mc:Fallback>
+        <mc:Fallback xmlns="">
           <p:sp>
             <p:nvSpPr>
               <p:cNvPr id="6" name="文本框 5">
@@ -13621,8 +13575,8 @@
           </p:sp>
         </mc:Fallback>
       </mc:AlternateContent>
-      <mc:AlternateContent xmlns:mc="http://schemas.openxmlformats.org/markup-compatibility/2006">
-        <mc:Choice xmlns:a14="http://schemas.microsoft.com/office/drawing/2010/main" Requires="a14">
+      <mc:AlternateContent xmlns:mc="http://schemas.openxmlformats.org/markup-compatibility/2006" xmlns:a14="http://schemas.microsoft.com/office/drawing/2010/main">
+        <mc:Choice Requires="a14">
           <p:sp>
             <p:nvSpPr>
               <p:cNvPr id="7" name="文本框 6">
@@ -13807,7 +13761,7 @@
             </p:txBody>
           </p:sp>
         </mc:Choice>
-        <mc:Fallback>
+        <mc:Fallback xmlns="">
           <p:sp>
             <p:nvSpPr>
               <p:cNvPr id="7" name="文本框 6">
@@ -14646,8 +14600,8 @@
           </a:p>
         </p:txBody>
       </p:sp>
-      <mc:AlternateContent xmlns:mc="http://schemas.openxmlformats.org/markup-compatibility/2006">
-        <mc:Choice xmlns:a14="http://schemas.microsoft.com/office/drawing/2010/main" Requires="a14">
+      <mc:AlternateContent xmlns:mc="http://schemas.openxmlformats.org/markup-compatibility/2006" xmlns:a14="http://schemas.microsoft.com/office/drawing/2010/main">
+        <mc:Choice Requires="a14">
           <p:sp>
             <p:nvSpPr>
               <p:cNvPr id="11" name="文本框 10">
@@ -14957,7 +14911,7 @@
             </p:txBody>
           </p:sp>
         </mc:Choice>
-        <mc:Fallback>
+        <mc:Fallback xmlns="">
           <p:sp>
             <p:nvSpPr>
               <p:cNvPr id="11" name="文本框 10">
@@ -15002,8 +14956,8 @@
           </p:sp>
         </mc:Fallback>
       </mc:AlternateContent>
-      <mc:AlternateContent xmlns:mc="http://schemas.openxmlformats.org/markup-compatibility/2006">
-        <mc:Choice xmlns:a14="http://schemas.microsoft.com/office/drawing/2010/main" Requires="a14">
+      <mc:AlternateContent xmlns:mc="http://schemas.openxmlformats.org/markup-compatibility/2006" xmlns:a14="http://schemas.microsoft.com/office/drawing/2010/main">
+        <mc:Choice Requires="a14">
           <p:sp>
             <p:nvSpPr>
               <p:cNvPr id="12" name="文本框 11">
@@ -15175,7 +15129,7 @@
             </p:txBody>
           </p:sp>
         </mc:Choice>
-        <mc:Fallback>
+        <mc:Fallback xmlns="">
           <p:sp>
             <p:nvSpPr>
               <p:cNvPr id="12" name="文本框 11">
@@ -15220,8 +15174,8 @@
           </p:sp>
         </mc:Fallback>
       </mc:AlternateContent>
-      <mc:AlternateContent xmlns:mc="http://schemas.openxmlformats.org/markup-compatibility/2006">
-        <mc:Choice xmlns:a14="http://schemas.microsoft.com/office/drawing/2010/main" Requires="a14">
+      <mc:AlternateContent xmlns:mc="http://schemas.openxmlformats.org/markup-compatibility/2006" xmlns:a14="http://schemas.microsoft.com/office/drawing/2010/main">
+        <mc:Choice Requires="a14">
           <p:sp>
             <p:nvSpPr>
               <p:cNvPr id="13" name="文本框 12">
@@ -15497,7 +15451,7 @@
             </p:txBody>
           </p:sp>
         </mc:Choice>
-        <mc:Fallback>
+        <mc:Fallback xmlns="">
           <p:sp>
             <p:nvSpPr>
               <p:cNvPr id="13" name="文本框 12">
@@ -16563,25 +16517,7 @@
                 </a:solidFill>
                 <a:latin typeface="+mn-lt"/>
               </a:rPr>
-              <a:t>Implement reinforcement learning and </a:t>
-            </a:r>
-            <a:r>
-              <a:rPr lang="en-US" altLang="zh-CN" sz="2300" b="1" dirty="0" smtClean="0">
-                <a:solidFill>
-                  <a:schemeClr val="tx1"/>
-                </a:solidFill>
-                <a:latin typeface="+mn-lt"/>
-              </a:rPr>
-              <a:t>evaluate it in the </a:t>
-            </a:r>
-            <a:r>
-              <a:rPr lang="en-US" altLang="zh-CN" sz="2300" b="1" dirty="0" smtClean="0">
-                <a:solidFill>
-                  <a:schemeClr val="tx1"/>
-                </a:solidFill>
-                <a:latin typeface="+mn-lt"/>
-              </a:rPr>
-              <a:t>experiment</a:t>
+              <a:t>Implement reinforcement learning and evaluate it in the experiment</a:t>
             </a:r>
           </a:p>
           <a:p>
